--- a/report-generator/tests/report_generator/integration/references/reference_system-maintainability-one-pager.pptx
+++ b/report-generator/tests/report_generator/integration/references/reference_system-maintainability-one-pager.pptx
@@ -20856,7 +20856,7 @@
           <a:p>
             <a:r>
               <a:rPr lang="en-US"/>
-              <a:t>Maintainability report for Integrationtest-kafka for the period 2026-01-11 and 2026-03-8</a:t>
+              <a:t>Maintainability report for Integrationtest-kafka for the period 2026-01-11 and 2026-03-08</a:t>
             </a:r>
             <a:endParaRPr lang="en-US"/>
           </a:p>

--- a/report-generator/tests/report_generator/integration/references/reference_system-maintainability-one-pager.pptx
+++ b/report-generator/tests/report_generator/integration/references/reference_system-maintainability-one-pager.pptx
@@ -20856,7 +20856,7 @@
           <a:p>
             <a:r>
               <a:rPr lang="en-US"/>
-              <a:t>Maintainability report for Integrationtest-kafka for the period 2026-01-11 and 2026-03-08</a:t>
+              <a:t>Maintainability report for Integrationtest-kafka for the period 11 January 2026 and 8 March 2026</a:t>
             </a:r>
             <a:endParaRPr lang="en-US"/>
           </a:p>
